--- a/src/teaching/2020-2021/252-unix-admin-summer/slides/files.pptx
+++ b/src/teaching/2020-2021/252-unix-admin-summer/slides/files.pptx
@@ -323,7 +323,7 @@
           <a:p>
             <a:fld id="{B1EC3902-BE1C-437D-A505-B38432DC6CC6}" type="datetimeFigureOut">
               <a:rPr lang="en-US" smtClean="0"/>
-              <a:t>2/15/2021</a:t>
+              <a:t>5/30/2021</a:t>
             </a:fld>
             <a:endParaRPr lang="en-US"/>
           </a:p>
@@ -908,7 +908,7 @@
           <a:p>
             <a:fld id="{BFA5F2CB-3A11-435A-8A64-9C8C5C260B87}" type="datetimeFigureOut">
               <a:rPr lang="en-US" smtClean="0"/>
-              <a:t>2/15/2021</a:t>
+              <a:t>5/30/2021</a:t>
             </a:fld>
             <a:endParaRPr lang="en-US"/>
           </a:p>
@@ -1106,7 +1106,7 @@
           <a:p>
             <a:fld id="{BFA5F2CB-3A11-435A-8A64-9C8C5C260B87}" type="datetimeFigureOut">
               <a:rPr lang="en-US" smtClean="0"/>
-              <a:t>2/15/2021</a:t>
+              <a:t>5/30/2021</a:t>
             </a:fld>
             <a:endParaRPr lang="en-US"/>
           </a:p>
@@ -1314,7 +1314,7 @@
           <a:p>
             <a:fld id="{BFA5F2CB-3A11-435A-8A64-9C8C5C260B87}" type="datetimeFigureOut">
               <a:rPr lang="en-US" smtClean="0"/>
-              <a:t>2/15/2021</a:t>
+              <a:t>5/30/2021</a:t>
             </a:fld>
             <a:endParaRPr lang="en-US"/>
           </a:p>
@@ -1512,7 +1512,7 @@
           <a:p>
             <a:fld id="{BFA5F2CB-3A11-435A-8A64-9C8C5C260B87}" type="datetimeFigureOut">
               <a:rPr lang="en-US" smtClean="0"/>
-              <a:t>2/15/2021</a:t>
+              <a:t>5/30/2021</a:t>
             </a:fld>
             <a:endParaRPr lang="en-US"/>
           </a:p>
@@ -1787,7 +1787,7 @@
           <a:p>
             <a:fld id="{BFA5F2CB-3A11-435A-8A64-9C8C5C260B87}" type="datetimeFigureOut">
               <a:rPr lang="en-US" smtClean="0"/>
-              <a:t>2/15/2021</a:t>
+              <a:t>5/30/2021</a:t>
             </a:fld>
             <a:endParaRPr lang="en-US"/>
           </a:p>
@@ -2052,7 +2052,7 @@
           <a:p>
             <a:fld id="{BFA5F2CB-3A11-435A-8A64-9C8C5C260B87}" type="datetimeFigureOut">
               <a:rPr lang="en-US" smtClean="0"/>
-              <a:t>2/15/2021</a:t>
+              <a:t>5/30/2021</a:t>
             </a:fld>
             <a:endParaRPr lang="en-US"/>
           </a:p>
@@ -2464,7 +2464,7 @@
           <a:p>
             <a:fld id="{BFA5F2CB-3A11-435A-8A64-9C8C5C260B87}" type="datetimeFigureOut">
               <a:rPr lang="en-US" smtClean="0"/>
-              <a:t>2/15/2021</a:t>
+              <a:t>5/30/2021</a:t>
             </a:fld>
             <a:endParaRPr lang="en-US"/>
           </a:p>
@@ -2605,7 +2605,7 @@
           <a:p>
             <a:fld id="{BFA5F2CB-3A11-435A-8A64-9C8C5C260B87}" type="datetimeFigureOut">
               <a:rPr lang="en-US" smtClean="0"/>
-              <a:t>2/15/2021</a:t>
+              <a:t>5/30/2021</a:t>
             </a:fld>
             <a:endParaRPr lang="en-US"/>
           </a:p>
@@ -2718,7 +2718,7 @@
           <a:p>
             <a:fld id="{BFA5F2CB-3A11-435A-8A64-9C8C5C260B87}" type="datetimeFigureOut">
               <a:rPr lang="en-US" smtClean="0"/>
-              <a:t>2/15/2021</a:t>
+              <a:t>5/30/2021</a:t>
             </a:fld>
             <a:endParaRPr lang="en-US"/>
           </a:p>
@@ -3029,7 +3029,7 @@
           <a:p>
             <a:fld id="{BFA5F2CB-3A11-435A-8A64-9C8C5C260B87}" type="datetimeFigureOut">
               <a:rPr lang="en-US" smtClean="0"/>
-              <a:t>2/15/2021</a:t>
+              <a:t>5/30/2021</a:t>
             </a:fld>
             <a:endParaRPr lang="en-US"/>
           </a:p>
@@ -3317,7 +3317,7 @@
           <a:p>
             <a:fld id="{BFA5F2CB-3A11-435A-8A64-9C8C5C260B87}" type="datetimeFigureOut">
               <a:rPr lang="en-US" smtClean="0"/>
-              <a:t>2/15/2021</a:t>
+              <a:t>5/30/2021</a:t>
             </a:fld>
             <a:endParaRPr lang="en-US"/>
           </a:p>
@@ -3558,7 +3558,7 @@
           <a:p>
             <a:fld id="{BFA5F2CB-3A11-435A-8A64-9C8C5C260B87}" type="datetimeFigureOut">
               <a:rPr lang="en-US" smtClean="0"/>
-              <a:t>2/15/2021</a:t>
+              <a:t>5/30/2021</a:t>
             </a:fld>
             <a:endParaRPr lang="en-US"/>
           </a:p>
@@ -5497,41 +5497,6 @@
           </a:p>
           <a:p>
             <a:endParaRPr lang="en-US" dirty="0"/>
-          </a:p>
-        </p:txBody>
-      </p:sp>
-      <p:sp>
-        <p:nvSpPr>
-          <p:cNvPr id="11" name="TextBox 10">
-            <a:extLst>
-              <a:ext uri="{FF2B5EF4-FFF2-40B4-BE49-F238E27FC236}">
-                <a16:creationId xmlns:a16="http://schemas.microsoft.com/office/drawing/2014/main" id="{D2C8E783-2C01-43C8-AFED-E855891C4B32}"/>
-              </a:ext>
-            </a:extLst>
-          </p:cNvPr>
-          <p:cNvSpPr txBox="1"/>
-          <p:nvPr/>
-        </p:nvSpPr>
-        <p:spPr>
-          <a:xfrm>
-            <a:off x="187027" y="6607175"/>
-            <a:ext cx="2743200" cy="230832"/>
-          </a:xfrm>
-          <a:prstGeom prst="rect">
-            <a:avLst/>
-          </a:prstGeom>
-          <a:noFill/>
-        </p:spPr>
-        <p:txBody>
-          <a:bodyPr wrap="square" rtlCol="0">
-            <a:spAutoFit/>
-          </a:bodyPr>
-          <a:lstStyle/>
-          <a:p>
-            <a:r>
-              <a:rPr lang="en-US" sz="900" dirty="0"/>
-              <a:t>Photo Credit: Patrick Earl</a:t>
-            </a:r>
           </a:p>
         </p:txBody>
       </p:sp>
